--- a/output_pptx/I_Surrender_All.pptx
+++ b/output_pptx/I_Surrender_All.pptx
@@ -3107,8 +3107,8 @@
         </p:nvSpPr>
         <p:spPr>
           <a:xfrm>
-            <a:off x="594360" y="1837944"/>
-            <a:ext cx="11002975" cy="685800"/>
+            <a:off x="640080" y="1650492"/>
+            <a:ext cx="10911535" cy="731520"/>
           </a:xfrm>
           <a:prstGeom prst="rect">
             <a:avLst/>
@@ -3123,7 +3123,7 @@
           <a:p>
             <a:pPr algn="ctr"/>
             <a:r>
-              <a:rPr sz="4400" b="1" i="0">
+              <a:rPr sz="4800" b="1" i="0">
                 <a:solidFill>
                   <a:srgbClr val="FFFFFF"/>
                 </a:solidFill>
@@ -3142,8 +3142,8 @@
         </p:nvSpPr>
         <p:spPr>
           <a:xfrm>
-            <a:off x="594360" y="2560320"/>
-            <a:ext cx="11002975" cy="384048"/>
+            <a:off x="640080" y="2418588"/>
+            <a:ext cx="10911535" cy="365760"/>
           </a:xfrm>
           <a:prstGeom prst="rect">
             <a:avLst/>
@@ -3160,7 +3160,7 @@
             <a:r>
               <a:rPr sz="2400" b="0" i="1">
                 <a:solidFill>
-                  <a:srgbClr val="B4B4B4"/>
+                  <a:srgbClr val="AAAAAA"/>
                 </a:solidFill>
                 <a:latin typeface="Arial"/>
               </a:rPr>
@@ -3177,8 +3177,8 @@
         </p:nvSpPr>
         <p:spPr>
           <a:xfrm>
-            <a:off x="594360" y="2980944"/>
-            <a:ext cx="11002975" cy="347472"/>
+            <a:off x="640080" y="2985516"/>
+            <a:ext cx="10911535" cy="731520"/>
           </a:xfrm>
           <a:prstGeom prst="rect">
             <a:avLst/>
@@ -3193,13 +3193,13 @@
           <a:p>
             <a:pPr algn="ctr"/>
             <a:r>
-              <a:rPr sz="2000" b="0" i="1">
-                <a:solidFill>
-                  <a:srgbClr val="8C8C8C"/>
+              <a:rPr sz="4800" b="1" i="0">
+                <a:solidFill>
+                  <a:srgbClr val="FFFFFF"/>
                 </a:solidFill>
                 <a:latin typeface="Arial"/>
               </a:rPr>
-              <a:t/>
+              <a:t>日々主を     愛して　   お委ね します</a:t>
             </a:r>
           </a:p>
         </p:txBody>
@@ -3212,8 +3212,8 @@
         </p:nvSpPr>
         <p:spPr>
           <a:xfrm>
-            <a:off x="594360" y="3529584"/>
-            <a:ext cx="11002975" cy="685800"/>
+            <a:off x="640080" y="3753612"/>
+            <a:ext cx="10911535" cy="365760"/>
           </a:xfrm>
           <a:prstGeom prst="rect">
             <a:avLst/>
@@ -3228,13 +3228,13 @@
           <a:p>
             <a:pPr algn="ctr"/>
             <a:r>
-              <a:rPr sz="4400" b="1" i="0">
-                <a:solidFill>
-                  <a:srgbClr val="FFFFFF"/>
+              <a:rPr sz="2400" b="0" i="1">
+                <a:solidFill>
+                  <a:srgbClr val="AAAAAA"/>
                 </a:solidFill>
                 <a:latin typeface="Arial"/>
               </a:rPr>
-              <a:t>日々主を     愛して　   お委ね します</a:t>
+              <a:t>hibi shu wo aishite oyudaneshimasu</a:t>
             </a:r>
           </a:p>
         </p:txBody>
@@ -3247,8 +3247,8 @@
         </p:nvSpPr>
         <p:spPr>
           <a:xfrm>
-            <a:off x="594360" y="4251960"/>
-            <a:ext cx="11002975" cy="384048"/>
+            <a:off x="640080" y="4530852"/>
+            <a:ext cx="10911535" cy="310896"/>
           </a:xfrm>
           <a:prstGeom prst="rect">
             <a:avLst/>
@@ -3263,13 +3263,13 @@
           <a:p>
             <a:pPr algn="ctr"/>
             <a:r>
-              <a:rPr sz="2400" b="0" i="1">
-                <a:solidFill>
-                  <a:srgbClr val="B4B4B4"/>
+              <a:rPr sz="2000" b="0" i="1">
+                <a:solidFill>
+                  <a:srgbClr val="828282"/>
                 </a:solidFill>
                 <a:latin typeface="Arial"/>
               </a:rPr>
-              <a:t>hibi shu wo aishite oyudaneshimasu</a:t>
+              <a:t>Tudo Entregarei</a:t>
             </a:r>
           </a:p>
         </p:txBody>
@@ -3282,8 +3282,8 @@
         </p:nvSpPr>
         <p:spPr>
           <a:xfrm>
-            <a:off x="594360" y="4672584"/>
-            <a:ext cx="11002975" cy="347472"/>
+            <a:off x="640080" y="4896612"/>
+            <a:ext cx="10911535" cy="310896"/>
           </a:xfrm>
           <a:prstGeom prst="rect">
             <a:avLst/>
@@ -3300,11 +3300,11 @@
             <a:r>
               <a:rPr sz="2000" b="0" i="1">
                 <a:solidFill>
-                  <a:srgbClr val="8C8C8C"/>
+                  <a:srgbClr val="828282"/>
                 </a:solidFill>
                 <a:latin typeface="Arial"/>
               </a:rPr>
-              <a:t/>
+              <a:t>Tudo a Jesus, eu me rendo</a:t>
             </a:r>
           </a:p>
         </p:txBody>
@@ -3343,8 +3343,8 @@
         </p:nvSpPr>
         <p:spPr>
           <a:xfrm>
-            <a:off x="594360" y="1837944"/>
-            <a:ext cx="11002975" cy="685800"/>
+            <a:off x="640080" y="1650492"/>
+            <a:ext cx="10911535" cy="731520"/>
           </a:xfrm>
           <a:prstGeom prst="rect">
             <a:avLst/>
@@ -3359,7 +3359,7 @@
           <a:p>
             <a:pPr algn="ctr"/>
             <a:r>
-              <a:rPr sz="4400" b="1" i="0">
+              <a:rPr sz="4800" b="1" i="0">
                 <a:solidFill>
                   <a:srgbClr val="FFFFFF"/>
                 </a:solidFill>
@@ -3378,8 +3378,8 @@
         </p:nvSpPr>
         <p:spPr>
           <a:xfrm>
-            <a:off x="594360" y="2560320"/>
-            <a:ext cx="11002975" cy="384048"/>
+            <a:off x="640080" y="2418588"/>
+            <a:ext cx="10911535" cy="365760"/>
           </a:xfrm>
           <a:prstGeom prst="rect">
             <a:avLst/>
@@ -3396,7 +3396,7 @@
             <a:r>
               <a:rPr sz="2400" b="0" i="1">
                 <a:solidFill>
-                  <a:srgbClr val="B4B4B4"/>
+                  <a:srgbClr val="AAAAAA"/>
                 </a:solidFill>
                 <a:latin typeface="Arial"/>
               </a:rPr>
@@ -3413,8 +3413,8 @@
         </p:nvSpPr>
         <p:spPr>
           <a:xfrm>
-            <a:off x="594360" y="2980944"/>
-            <a:ext cx="11002975" cy="347472"/>
+            <a:off x="640080" y="2985516"/>
+            <a:ext cx="10911535" cy="731520"/>
           </a:xfrm>
           <a:prstGeom prst="rect">
             <a:avLst/>
@@ -3429,13 +3429,13 @@
           <a:p>
             <a:pPr algn="ctr"/>
             <a:r>
-              <a:rPr sz="2000" b="0" i="1">
-                <a:solidFill>
-                  <a:srgbClr val="8C8C8C"/>
+              <a:rPr sz="4800" b="1" i="0">
+                <a:solidFill>
+                  <a:srgbClr val="FFFFFF"/>
                 </a:solidFill>
                 <a:latin typeface="Arial"/>
               </a:rPr>
-              <a:t>Em Sua presença, hei de viver</a:t>
+              <a:t>わたしの   すべて を  ささげます</a:t>
             </a:r>
           </a:p>
         </p:txBody>
@@ -3448,8 +3448,8 @@
         </p:nvSpPr>
         <p:spPr>
           <a:xfrm>
-            <a:off x="594360" y="3529584"/>
-            <a:ext cx="11002975" cy="685800"/>
+            <a:off x="640080" y="3753612"/>
+            <a:ext cx="10911535" cy="365760"/>
           </a:xfrm>
           <a:prstGeom prst="rect">
             <a:avLst/>
@@ -3464,13 +3464,13 @@
           <a:p>
             <a:pPr algn="ctr"/>
             <a:r>
-              <a:rPr sz="4400" b="1" i="0">
-                <a:solidFill>
-                  <a:srgbClr val="FFFFFF"/>
+              <a:rPr sz="2400" b="0" i="1">
+                <a:solidFill>
+                  <a:srgbClr val="AAAAAA"/>
                 </a:solidFill>
                 <a:latin typeface="Arial"/>
               </a:rPr>
-              <a:t>わたしの   すべて を  ささげます</a:t>
+              <a:t>watashino subete wo sasagemasu</a:t>
             </a:r>
           </a:p>
         </p:txBody>
@@ -3483,8 +3483,8 @@
         </p:nvSpPr>
         <p:spPr>
           <a:xfrm>
-            <a:off x="594360" y="4251960"/>
-            <a:ext cx="11002975" cy="384048"/>
+            <a:off x="640080" y="4530852"/>
+            <a:ext cx="10911535" cy="310896"/>
           </a:xfrm>
           <a:prstGeom prst="rect">
             <a:avLst/>
@@ -3499,13 +3499,13 @@
           <a:p>
             <a:pPr algn="ctr"/>
             <a:r>
-              <a:rPr sz="2400" b="0" i="1">
-                <a:solidFill>
-                  <a:srgbClr val="B4B4B4"/>
+              <a:rPr sz="2000" b="0" i="1">
+                <a:solidFill>
+                  <a:srgbClr val="828282"/>
                 </a:solidFill>
                 <a:latin typeface="Arial"/>
               </a:rPr>
-              <a:t>watashino subete wo sasagemasu</a:t>
+              <a:t>Em Sua presença, hei de viver</a:t>
             </a:r>
           </a:p>
         </p:txBody>
@@ -3518,8 +3518,8 @@
         </p:nvSpPr>
         <p:spPr>
           <a:xfrm>
-            <a:off x="594360" y="4672584"/>
-            <a:ext cx="11002975" cy="347472"/>
+            <a:off x="640080" y="4896612"/>
+            <a:ext cx="10911535" cy="310896"/>
           </a:xfrm>
           <a:prstGeom prst="rect">
             <a:avLst/>
@@ -3536,7 +3536,7 @@
             <a:r>
               <a:rPr sz="2000" b="0" i="1">
                 <a:solidFill>
-                  <a:srgbClr val="8C8C8C"/>
+                  <a:srgbClr val="828282"/>
                 </a:solidFill>
                 <a:latin typeface="Arial"/>
               </a:rPr>
@@ -3579,8 +3579,8 @@
         </p:nvSpPr>
         <p:spPr>
           <a:xfrm>
-            <a:off x="594360" y="1837944"/>
-            <a:ext cx="11002975" cy="685800"/>
+            <a:off x="640080" y="1650492"/>
+            <a:ext cx="10911535" cy="731520"/>
           </a:xfrm>
           <a:prstGeom prst="rect">
             <a:avLst/>
@@ -3595,7 +3595,7 @@
           <a:p>
             <a:pPr algn="ctr"/>
             <a:r>
-              <a:rPr sz="2640" b="1" i="0">
+              <a:rPr sz="2800" b="1" i="0">
                 <a:solidFill>
                   <a:srgbClr val="FFFFFF"/>
                 </a:solidFill>
@@ -3614,8 +3614,8 @@
         </p:nvSpPr>
         <p:spPr>
           <a:xfrm>
-            <a:off x="594360" y="2560320"/>
-            <a:ext cx="11002975" cy="384048"/>
+            <a:off x="640080" y="2418588"/>
+            <a:ext cx="10911535" cy="365760"/>
           </a:xfrm>
           <a:prstGeom prst="rect">
             <a:avLst/>
@@ -3630,9 +3630,9 @@
           <a:p>
             <a:pPr algn="ctr"/>
             <a:r>
-              <a:rPr sz="1625" b="0" i="1">
-                <a:solidFill>
-                  <a:srgbClr val="B4B4B4"/>
+              <a:rPr sz="2000" b="0" i="1">
+                <a:solidFill>
+                  <a:srgbClr val="AAAAAA"/>
                 </a:solidFill>
                 <a:latin typeface="Arial"/>
               </a:rPr>
@@ -3649,8 +3649,8 @@
         </p:nvSpPr>
         <p:spPr>
           <a:xfrm>
-            <a:off x="594360" y="2980944"/>
-            <a:ext cx="11002975" cy="347472"/>
+            <a:off x="640080" y="2985516"/>
+            <a:ext cx="10911535" cy="731520"/>
           </a:xfrm>
           <a:prstGeom prst="rect">
             <a:avLst/>
@@ -3665,13 +3665,13 @@
           <a:p>
             <a:pPr algn="ctr"/>
             <a:r>
-              <a:rPr sz="2000" b="0" i="1">
-                <a:solidFill>
-                  <a:srgbClr val="8C8C8C"/>
+              <a:rPr sz="2800" b="1" i="0">
+                <a:solidFill>
+                  <a:srgbClr val="FFFFFF"/>
                 </a:solidFill>
                 <a:latin typeface="Arial"/>
               </a:rPr>
-              <a:t>Tudo a Jesus, eu me rendo</a:t>
+              <a:t>救い に　よる   よろこび     罪　　と　死　に　勝ち  　　神　に　栄光</a:t>
             </a:r>
           </a:p>
         </p:txBody>
@@ -3684,8 +3684,8 @@
         </p:nvSpPr>
         <p:spPr>
           <a:xfrm>
-            <a:off x="594360" y="3529584"/>
-            <a:ext cx="11002975" cy="685800"/>
+            <a:off x="640080" y="3753612"/>
+            <a:ext cx="10911535" cy="365760"/>
           </a:xfrm>
           <a:prstGeom prst="rect">
             <a:avLst/>
@@ -3700,13 +3700,13 @@
           <a:p>
             <a:pPr algn="ctr"/>
             <a:r>
-              <a:rPr sz="2640" b="1" i="0">
-                <a:solidFill>
-                  <a:srgbClr val="FFFFFF"/>
+              <a:rPr sz="2000" b="0" i="1">
+                <a:solidFill>
+                  <a:srgbClr val="AAAAAA"/>
                 </a:solidFill>
                 <a:latin typeface="Arial"/>
               </a:rPr>
-              <a:t>救い に　よる   よろこび     罪　　と　死　に　勝ち  　　神　に　栄光</a:t>
+              <a:t>sukui ni yoru yorokobi   tsumi to shi ni kachi   kami ni eikou</a:t>
             </a:r>
           </a:p>
         </p:txBody>
@@ -3719,8 +3719,8 @@
         </p:nvSpPr>
         <p:spPr>
           <a:xfrm>
-            <a:off x="594360" y="4251960"/>
-            <a:ext cx="11002975" cy="384048"/>
+            <a:off x="640080" y="4530852"/>
+            <a:ext cx="10911535" cy="310896"/>
           </a:xfrm>
           <a:prstGeom prst="rect">
             <a:avLst/>
@@ -3735,13 +3735,13 @@
           <a:p>
             <a:pPr algn="ctr"/>
             <a:r>
-              <a:rPr sz="1625" b="0" i="1">
-                <a:solidFill>
-                  <a:srgbClr val="B4B4B4"/>
+              <a:rPr sz="2000" b="0" i="1">
+                <a:solidFill>
+                  <a:srgbClr val="828282"/>
                 </a:solidFill>
                 <a:latin typeface="Arial"/>
               </a:rPr>
-              <a:t>sukui ni yoru yorokobi   tsumi to shi ni kachi   kami ni eikou</a:t>
+              <a:t>Tudo a Jesus, eu me rendo</a:t>
             </a:r>
           </a:p>
         </p:txBody>
@@ -3754,8 +3754,8 @@
         </p:nvSpPr>
         <p:spPr>
           <a:xfrm>
-            <a:off x="594360" y="4672584"/>
-            <a:ext cx="11002975" cy="347472"/>
+            <a:off x="640080" y="4896612"/>
+            <a:ext cx="10911535" cy="310896"/>
           </a:xfrm>
           <a:prstGeom prst="rect">
             <a:avLst/>
@@ -3772,7 +3772,7 @@
             <a:r>
               <a:rPr sz="2000" b="0" i="1">
                 <a:solidFill>
-                  <a:srgbClr val="8C8C8C"/>
+                  <a:srgbClr val="828282"/>
                 </a:solidFill>
                 <a:latin typeface="Arial"/>
               </a:rPr>
@@ -3815,8 +3815,8 @@
         </p:nvSpPr>
         <p:spPr>
           <a:xfrm>
-            <a:off x="594360" y="1837944"/>
-            <a:ext cx="11002975" cy="685800"/>
+            <a:off x="640080" y="1650492"/>
+            <a:ext cx="10911535" cy="731520"/>
           </a:xfrm>
           <a:prstGeom prst="rect">
             <a:avLst/>
@@ -3831,7 +3831,7 @@
           <a:p>
             <a:pPr algn="ctr"/>
             <a:r>
-              <a:rPr sz="4400" b="1" i="0">
+              <a:rPr sz="4800" b="1" i="0">
                 <a:solidFill>
                   <a:srgbClr val="FFFFFF"/>
                 </a:solidFill>
@@ -3850,8 +3850,8 @@
         </p:nvSpPr>
         <p:spPr>
           <a:xfrm>
-            <a:off x="594360" y="2560320"/>
-            <a:ext cx="11002975" cy="384048"/>
+            <a:off x="640080" y="2418588"/>
+            <a:ext cx="10911535" cy="365760"/>
           </a:xfrm>
           <a:prstGeom prst="rect">
             <a:avLst/>
@@ -3868,7 +3868,7 @@
             <a:r>
               <a:rPr sz="2400" b="0" i="1">
                 <a:solidFill>
-                  <a:srgbClr val="B4B4B4"/>
+                  <a:srgbClr val="AAAAAA"/>
                 </a:solidFill>
                 <a:latin typeface="Arial"/>
               </a:rPr>
@@ -3885,8 +3885,8 @@
         </p:nvSpPr>
         <p:spPr>
           <a:xfrm>
-            <a:off x="594360" y="2980944"/>
-            <a:ext cx="11002975" cy="347472"/>
+            <a:off x="640080" y="2985516"/>
+            <a:ext cx="10911535" cy="731520"/>
           </a:xfrm>
           <a:prstGeom prst="rect">
             <a:avLst/>
@@ -3901,13 +3901,13 @@
           <a:p>
             <a:pPr algn="ctr"/>
             <a:r>
-              <a:rPr sz="2000" b="0" i="1">
-                <a:solidFill>
-                  <a:srgbClr val="8C8C8C"/>
+              <a:rPr sz="4800" b="1" i="0">
+                <a:solidFill>
+                  <a:srgbClr val="FFFFFF"/>
                 </a:solidFill>
                 <a:latin typeface="Arial"/>
               </a:rPr>
-              <a:t>Em Sua presença, hei de viver</a:t>
+              <a:t>わたしの   すべて を  ささげます</a:t>
             </a:r>
           </a:p>
         </p:txBody>
@@ -3920,8 +3920,8 @@
         </p:nvSpPr>
         <p:spPr>
           <a:xfrm>
-            <a:off x="594360" y="3529584"/>
-            <a:ext cx="11002975" cy="685800"/>
+            <a:off x="640080" y="3753612"/>
+            <a:ext cx="10911535" cy="365760"/>
           </a:xfrm>
           <a:prstGeom prst="rect">
             <a:avLst/>
@@ -3936,13 +3936,13 @@
           <a:p>
             <a:pPr algn="ctr"/>
             <a:r>
-              <a:rPr sz="4400" b="1" i="0">
-                <a:solidFill>
-                  <a:srgbClr val="FFFFFF"/>
+              <a:rPr sz="2400" b="0" i="1">
+                <a:solidFill>
+                  <a:srgbClr val="AAAAAA"/>
                 </a:solidFill>
                 <a:latin typeface="Arial"/>
               </a:rPr>
-              <a:t>わたしの   すべて を  ささげます</a:t>
+              <a:t>watashino subete wo sasagemasu</a:t>
             </a:r>
           </a:p>
         </p:txBody>
@@ -3955,8 +3955,8 @@
         </p:nvSpPr>
         <p:spPr>
           <a:xfrm>
-            <a:off x="594360" y="4251960"/>
-            <a:ext cx="11002975" cy="384048"/>
+            <a:off x="640080" y="4530852"/>
+            <a:ext cx="10911535" cy="310896"/>
           </a:xfrm>
           <a:prstGeom prst="rect">
             <a:avLst/>
@@ -3971,13 +3971,13 @@
           <a:p>
             <a:pPr algn="ctr"/>
             <a:r>
-              <a:rPr sz="2400" b="0" i="1">
-                <a:solidFill>
-                  <a:srgbClr val="B4B4B4"/>
+              <a:rPr sz="2000" b="0" i="1">
+                <a:solidFill>
+                  <a:srgbClr val="828282"/>
                 </a:solidFill>
                 <a:latin typeface="Arial"/>
               </a:rPr>
-              <a:t>watashino subete wo sasagemasu</a:t>
+              <a:t>Em Sua presença, hei de viver</a:t>
             </a:r>
           </a:p>
         </p:txBody>
@@ -3990,8 +3990,8 @@
         </p:nvSpPr>
         <p:spPr>
           <a:xfrm>
-            <a:off x="594360" y="4672584"/>
-            <a:ext cx="11002975" cy="347472"/>
+            <a:off x="640080" y="4896612"/>
+            <a:ext cx="10911535" cy="310896"/>
           </a:xfrm>
           <a:prstGeom prst="rect">
             <a:avLst/>
@@ -4008,7 +4008,7 @@
             <a:r>
               <a:rPr sz="2000" b="0" i="1">
                 <a:solidFill>
-                  <a:srgbClr val="8C8C8C"/>
+                  <a:srgbClr val="828282"/>
                 </a:solidFill>
                 <a:latin typeface="Arial"/>
               </a:rPr>
